--- a/assets/pptx/catalog-455.pptx
+++ b/assets/pptx/catalog-455.pptx
@@ -3489,7 +3489,7 @@
                 <a:ea typeface="Ebrima"/>
                 <a:cs typeface="Ebrima"/>
               </a:rPr>
-              <a:t>ውዴ ሆይ (8x)</a:t>
+              <a:t>ውዴ ሆይ 8x</a:t>
             </a:r>
           </a:p>
           <a:p>
@@ -3507,7 +3507,7 @@
                 <a:ea typeface="Ebrima"/>
                 <a:cs typeface="Ebrima"/>
               </a:rPr>
-              <a:t>አንተ የእኔ ነህ እኔም የአንተ እኮ ነኝ (4x)</a:t>
+              <a:t>አንተ የእኔ ነህ እኔም የአንተ እኮ ነኝ 4x</a:t>
             </a:r>
           </a:p>
         </p:txBody>
